--- a/Квиз_1С-ЭПД_Доки_Логистика ИИ ПОПРАВИТЬ.pptx
+++ b/Квиз_1С-ЭПД_Доки_Логистика ИИ ПОПРАВИТЬ.pptx
@@ -7176,24 +7176,21 @@
               <p:cTn id="2" dur="indefinite" nodeType="mainSeq">
                 <p:childTnLst>
                   <p:par>
-                    <p:cTn id="3" fill="hold" nodeType="clickPar">
+                    <p:cTn id="3" fill="hold">
                       <p:stCondLst>
-                        <p:cond delay="indefinite"/>
-                        <p:cond evt="onBegin" delay="0">
-                          <p:tn val="2"/>
-                        </p:cond>
+                        <p:cond delay="0"/>
                       </p:stCondLst>
                       <p:childTnLst>
                         <p:par>
-                          <p:cTn id="4" fill="hold" nodeType="afterGroup">
+                          <p:cTn id="4" fill="hold">
                             <p:stCondLst>
-                              <p:cond delay="0"/>
+                              <p:cond delay="30000"/>
                             </p:stCondLst>
                             <p:childTnLst>
                               <p:par>
-                                <p:cTn id="5" presetID="1" presetClass="entr" presetSubtype="0" fill="hold" grpId="0" nodeType="afterEffect">
+                                <p:cTn id="5" presetID="1" presetClass="entr" presetSubtype="0" fill="hold" grpId="0" nodeType="withEffect">
                                   <p:stCondLst>
-                                    <p:cond delay="40000"/>
+                                    <p:cond delay="0"/>
                                   </p:stCondLst>
                                   <p:childTnLst>
                                     <p:set>
@@ -7886,24 +7883,21 @@
               <p:cTn id="2" dur="indefinite" nodeType="mainSeq">
                 <p:childTnLst>
                   <p:par>
-                    <p:cTn id="3" fill="hold" nodeType="clickPar">
+                    <p:cTn id="3" fill="hold">
                       <p:stCondLst>
-                        <p:cond delay="indefinite"/>
-                        <p:cond evt="onBegin" delay="0">
-                          <p:tn val="2"/>
-                        </p:cond>
+                        <p:cond delay="0"/>
                       </p:stCondLst>
                       <p:childTnLst>
                         <p:par>
-                          <p:cTn id="4" fill="hold" nodeType="afterGroup">
+                          <p:cTn id="4" fill="hold">
                             <p:stCondLst>
-                              <p:cond delay="0"/>
+                              <p:cond delay="30000"/>
                             </p:stCondLst>
                             <p:childTnLst>
                               <p:par>
-                                <p:cTn id="5" presetID="1" presetClass="entr" presetSubtype="0" fill="hold" grpId="0" nodeType="afterEffect">
+                                <p:cTn id="5" presetID="1" presetClass="entr" presetSubtype="0" fill="hold" grpId="0" nodeType="withEffect">
                                   <p:stCondLst>
-                                    <p:cond delay="40000"/>
+                                    <p:cond delay="0"/>
                                   </p:stCondLst>
                                   <p:childTnLst>
                                     <p:set>
@@ -8596,24 +8590,21 @@
               <p:cTn id="2" dur="indefinite" nodeType="mainSeq">
                 <p:childTnLst>
                   <p:par>
-                    <p:cTn id="3" fill="hold" nodeType="clickPar">
+                    <p:cTn id="3" fill="hold">
                       <p:stCondLst>
-                        <p:cond delay="indefinite"/>
-                        <p:cond evt="onBegin" delay="0">
-                          <p:tn val="2"/>
-                        </p:cond>
+                        <p:cond delay="0"/>
                       </p:stCondLst>
                       <p:childTnLst>
                         <p:par>
-                          <p:cTn id="4" fill="hold" nodeType="afterGroup">
+                          <p:cTn id="4" fill="hold">
                             <p:stCondLst>
-                              <p:cond delay="0"/>
+                              <p:cond delay="30000"/>
                             </p:stCondLst>
                             <p:childTnLst>
                               <p:par>
-                                <p:cTn id="5" presetID="1" presetClass="entr" presetSubtype="0" fill="hold" grpId="0" nodeType="afterEffect">
+                                <p:cTn id="5" presetID="1" presetClass="entr" presetSubtype="0" fill="hold" grpId="0" nodeType="withEffect">
                                   <p:stCondLst>
-                                    <p:cond delay="40000"/>
+                                    <p:cond delay="0"/>
                                   </p:stCondLst>
                                   <p:childTnLst>
                                     <p:set>
@@ -9498,24 +9489,21 @@
               <p:cTn id="2" dur="indefinite" nodeType="mainSeq">
                 <p:childTnLst>
                   <p:par>
-                    <p:cTn id="3" fill="hold" nodeType="clickPar">
+                    <p:cTn id="3" fill="hold">
                       <p:stCondLst>
-                        <p:cond delay="indefinite"/>
-                        <p:cond evt="onBegin" delay="0">
-                          <p:tn val="2"/>
-                        </p:cond>
+                        <p:cond delay="0"/>
                       </p:stCondLst>
                       <p:childTnLst>
                         <p:par>
-                          <p:cTn id="4" fill="hold" nodeType="afterGroup">
+                          <p:cTn id="4" fill="hold">
                             <p:stCondLst>
-                              <p:cond delay="0"/>
+                              <p:cond delay="30000"/>
                             </p:stCondLst>
                             <p:childTnLst>
                               <p:par>
-                                <p:cTn id="5" presetID="1" presetClass="entr" presetSubtype="0" fill="hold" grpId="0" nodeType="afterEffect">
+                                <p:cTn id="5" presetID="1" presetClass="entr" presetSubtype="0" fill="hold" grpId="0" nodeType="withEffect">
                                   <p:stCondLst>
-                                    <p:cond delay="40000"/>
+                                    <p:cond delay="0"/>
                                   </p:stCondLst>
                                   <p:childTnLst>
                                     <p:set>
@@ -10208,24 +10196,21 @@
               <p:cTn id="2" dur="indefinite" nodeType="mainSeq">
                 <p:childTnLst>
                   <p:par>
-                    <p:cTn id="3" fill="hold" nodeType="clickPar">
+                    <p:cTn id="3" fill="hold">
                       <p:stCondLst>
-                        <p:cond delay="indefinite"/>
-                        <p:cond evt="onBegin" delay="0">
-                          <p:tn val="2"/>
-                        </p:cond>
+                        <p:cond delay="0"/>
                       </p:stCondLst>
                       <p:childTnLst>
                         <p:par>
-                          <p:cTn id="4" fill="hold" nodeType="afterGroup">
+                          <p:cTn id="4" fill="hold">
                             <p:stCondLst>
-                              <p:cond delay="0"/>
+                              <p:cond delay="30000"/>
                             </p:stCondLst>
                             <p:childTnLst>
                               <p:par>
-                                <p:cTn id="5" presetID="1" presetClass="entr" presetSubtype="0" fill="hold" grpId="0" nodeType="afterEffect">
+                                <p:cTn id="5" presetID="1" presetClass="entr" presetSubtype="0" fill="hold" grpId="0" nodeType="withEffect">
                                   <p:stCondLst>
-                                    <p:cond delay="40000"/>
+                                    <p:cond delay="0"/>
                                   </p:stCondLst>
                                   <p:childTnLst>
                                     <p:set>
@@ -11066,24 +11051,21 @@
               <p:cTn id="2" dur="indefinite" nodeType="mainSeq">
                 <p:childTnLst>
                   <p:par>
-                    <p:cTn id="3" fill="hold" nodeType="clickPar">
+                    <p:cTn id="3" fill="hold">
                       <p:stCondLst>
-                        <p:cond delay="indefinite"/>
-                        <p:cond evt="onBegin" delay="0">
-                          <p:tn val="2"/>
-                        </p:cond>
+                        <p:cond delay="0"/>
                       </p:stCondLst>
                       <p:childTnLst>
                         <p:par>
-                          <p:cTn id="4" fill="hold" nodeType="afterGroup">
+                          <p:cTn id="4" fill="hold">
                             <p:stCondLst>
-                              <p:cond delay="0"/>
+                              <p:cond delay="30000"/>
                             </p:stCondLst>
                             <p:childTnLst>
                               <p:par>
-                                <p:cTn id="5" presetID="1" presetClass="entr" presetSubtype="0" fill="hold" grpId="0" nodeType="afterEffect">
+                                <p:cTn id="5" presetID="1" presetClass="entr" presetSubtype="0" fill="hold" grpId="0" nodeType="withEffect">
                                   <p:stCondLst>
-                                    <p:cond delay="40000"/>
+                                    <p:cond delay="0"/>
                                   </p:stCondLst>
                                   <p:childTnLst>
                                     <p:set>
@@ -11795,24 +11777,21 @@
               <p:cTn id="2" dur="indefinite" nodeType="mainSeq">
                 <p:childTnLst>
                   <p:par>
-                    <p:cTn id="3" fill="hold" nodeType="clickPar">
+                    <p:cTn id="3" fill="hold">
                       <p:stCondLst>
-                        <p:cond delay="indefinite"/>
-                        <p:cond evt="onBegin" delay="0">
-                          <p:tn val="2"/>
-                        </p:cond>
+                        <p:cond delay="0"/>
                       </p:stCondLst>
                       <p:childTnLst>
                         <p:par>
-                          <p:cTn id="4" fill="hold" nodeType="afterGroup">
+                          <p:cTn id="4" fill="hold">
                             <p:stCondLst>
-                              <p:cond delay="0"/>
+                              <p:cond delay="30000"/>
                             </p:stCondLst>
                             <p:childTnLst>
                               <p:par>
-                                <p:cTn id="5" presetID="1" presetClass="entr" presetSubtype="0" fill="hold" grpId="0" nodeType="afterEffect">
+                                <p:cTn id="5" presetID="1" presetClass="entr" presetSubtype="0" fill="hold" grpId="0" nodeType="withEffect">
                                   <p:stCondLst>
-                                    <p:cond delay="40000"/>
+                                    <p:cond delay="0"/>
                                   </p:stCondLst>
                                   <p:childTnLst>
                                     <p:set>
@@ -12505,24 +12484,21 @@
               <p:cTn id="2" dur="indefinite" nodeType="mainSeq">
                 <p:childTnLst>
                   <p:par>
-                    <p:cTn id="3" fill="hold" nodeType="clickPar">
+                    <p:cTn id="3" fill="hold">
                       <p:stCondLst>
-                        <p:cond delay="indefinite"/>
-                        <p:cond evt="onBegin" delay="0">
-                          <p:tn val="2"/>
-                        </p:cond>
+                        <p:cond delay="0"/>
                       </p:stCondLst>
                       <p:childTnLst>
                         <p:par>
-                          <p:cTn id="4" fill="hold" nodeType="afterGroup">
+                          <p:cTn id="4" fill="hold">
                             <p:stCondLst>
-                              <p:cond delay="0"/>
+                              <p:cond delay="30000"/>
                             </p:stCondLst>
                             <p:childTnLst>
                               <p:par>
-                                <p:cTn id="5" presetID="1" presetClass="entr" presetSubtype="0" fill="hold" grpId="0" nodeType="afterEffect">
+                                <p:cTn id="5" presetID="1" presetClass="entr" presetSubtype="0" fill="hold" grpId="0" nodeType="withEffect">
                                   <p:stCondLst>
-                                    <p:cond delay="40000"/>
+                                    <p:cond delay="0"/>
                                   </p:stCondLst>
                                   <p:childTnLst>
                                     <p:set>
@@ -13230,24 +13206,21 @@
               <p:cTn id="2" dur="indefinite" nodeType="mainSeq">
                 <p:childTnLst>
                   <p:par>
-                    <p:cTn id="3" fill="hold" nodeType="clickPar">
+                    <p:cTn id="3" fill="hold">
                       <p:stCondLst>
-                        <p:cond delay="indefinite"/>
-                        <p:cond evt="onBegin" delay="0">
-                          <p:tn val="2"/>
-                        </p:cond>
+                        <p:cond delay="0"/>
                       </p:stCondLst>
                       <p:childTnLst>
                         <p:par>
-                          <p:cTn id="4" fill="hold" nodeType="afterGroup">
+                          <p:cTn id="4" fill="hold">
                             <p:stCondLst>
-                              <p:cond delay="0"/>
+                              <p:cond delay="30000"/>
                             </p:stCondLst>
                             <p:childTnLst>
                               <p:par>
-                                <p:cTn id="5" presetID="1" presetClass="entr" presetSubtype="0" fill="hold" grpId="0" nodeType="afterEffect">
+                                <p:cTn id="5" presetID="1" presetClass="entr" presetSubtype="0" fill="hold" grpId="0" nodeType="withEffect">
                                   <p:stCondLst>
-                                    <p:cond delay="40000"/>
+                                    <p:cond delay="0"/>
                                   </p:stCondLst>
                                   <p:childTnLst>
                                     <p:set>
@@ -13940,24 +13913,21 @@
               <p:cTn id="2" dur="indefinite" nodeType="mainSeq">
                 <p:childTnLst>
                   <p:par>
-                    <p:cTn id="3" fill="hold" nodeType="clickPar">
+                    <p:cTn id="3" fill="hold">
                       <p:stCondLst>
-                        <p:cond delay="indefinite"/>
-                        <p:cond evt="onBegin" delay="0">
-                          <p:tn val="2"/>
-                        </p:cond>
+                        <p:cond delay="0"/>
                       </p:stCondLst>
                       <p:childTnLst>
                         <p:par>
-                          <p:cTn id="4" fill="hold" nodeType="afterGroup">
+                          <p:cTn id="4" fill="hold">
                             <p:stCondLst>
-                              <p:cond delay="0"/>
+                              <p:cond delay="30000"/>
                             </p:stCondLst>
                             <p:childTnLst>
                               <p:par>
-                                <p:cTn id="5" presetID="1" presetClass="entr" presetSubtype="0" fill="hold" grpId="0" nodeType="afterEffect">
+                                <p:cTn id="5" presetID="1" presetClass="entr" presetSubtype="0" fill="hold" grpId="0" nodeType="withEffect">
                                   <p:stCondLst>
-                                    <p:cond delay="40000"/>
+                                    <p:cond delay="0"/>
                                   </p:stCondLst>
                                   <p:childTnLst>
                                     <p:set>
@@ -16952,24 +16922,21 @@
               <p:cTn id="2" dur="indefinite" nodeType="mainSeq">
                 <p:childTnLst>
                   <p:par>
-                    <p:cTn id="3" fill="hold" nodeType="clickPar">
+                    <p:cTn id="3" fill="hold">
                       <p:stCondLst>
-                        <p:cond delay="indefinite"/>
-                        <p:cond evt="onBegin" delay="0">
-                          <p:tn val="2"/>
-                        </p:cond>
+                        <p:cond delay="0"/>
                       </p:stCondLst>
                       <p:childTnLst>
                         <p:par>
-                          <p:cTn id="4" fill="hold" nodeType="afterGroup">
+                          <p:cTn id="4" fill="hold">
                             <p:stCondLst>
-                              <p:cond delay="0"/>
+                              <p:cond delay="30000"/>
                             </p:stCondLst>
                             <p:childTnLst>
                               <p:par>
-                                <p:cTn id="5" presetID="1" presetClass="entr" presetSubtype="0" fill="hold" grpId="0" nodeType="afterEffect">
+                                <p:cTn id="5" presetID="1" presetClass="entr" presetSubtype="0" fill="hold" grpId="0" nodeType="withEffect">
                                   <p:stCondLst>
-                                    <p:cond delay="40000"/>
+                                    <p:cond delay="0"/>
                                   </p:stCondLst>
                                   <p:childTnLst>
                                     <p:set>
@@ -17697,24 +17664,21 @@
               <p:cTn id="2" dur="indefinite" nodeType="mainSeq">
                 <p:childTnLst>
                   <p:par>
-                    <p:cTn id="3" fill="hold" nodeType="clickPar">
+                    <p:cTn id="3" fill="hold">
                       <p:stCondLst>
-                        <p:cond delay="indefinite"/>
-                        <p:cond evt="onBegin" delay="0">
-                          <p:tn val="2"/>
-                        </p:cond>
+                        <p:cond delay="0"/>
                       </p:stCondLst>
                       <p:childTnLst>
                         <p:par>
-                          <p:cTn id="4" fill="hold" nodeType="afterGroup">
+                          <p:cTn id="4" fill="hold">
                             <p:stCondLst>
-                              <p:cond delay="0"/>
+                              <p:cond delay="30000"/>
                             </p:stCondLst>
                             <p:childTnLst>
                               <p:par>
-                                <p:cTn id="5" presetID="1" presetClass="entr" presetSubtype="0" fill="hold" grpId="0" nodeType="afterEffect">
+                                <p:cTn id="5" presetID="1" presetClass="entr" presetSubtype="0" fill="hold" grpId="0" nodeType="withEffect">
                                   <p:stCondLst>
-                                    <p:cond delay="40000"/>
+                                    <p:cond delay="0"/>
                                   </p:stCondLst>
                                   <p:childTnLst>
                                     <p:set>
@@ -18539,24 +18503,21 @@
               <p:cTn id="2" dur="indefinite" nodeType="mainSeq">
                 <p:childTnLst>
                   <p:par>
-                    <p:cTn id="3" fill="hold" nodeType="clickPar">
+                    <p:cTn id="3" fill="hold">
                       <p:stCondLst>
-                        <p:cond delay="indefinite"/>
-                        <p:cond evt="onBegin" delay="0">
-                          <p:tn val="2"/>
-                        </p:cond>
+                        <p:cond delay="0"/>
                       </p:stCondLst>
                       <p:childTnLst>
                         <p:par>
-                          <p:cTn id="4" fill="hold" nodeType="afterGroup">
+                          <p:cTn id="4" fill="hold">
                             <p:stCondLst>
-                              <p:cond delay="0"/>
+                              <p:cond delay="30000"/>
                             </p:stCondLst>
                             <p:childTnLst>
                               <p:par>
-                                <p:cTn id="5" presetID="1" presetClass="entr" presetSubtype="0" fill="hold" grpId="0" nodeType="afterEffect">
+                                <p:cTn id="5" presetID="1" presetClass="entr" presetSubtype="0" fill="hold" grpId="0" nodeType="withEffect">
                                   <p:stCondLst>
-                                    <p:cond delay="40000"/>
+                                    <p:cond delay="0"/>
                                   </p:stCondLst>
                                   <p:childTnLst>
                                     <p:set>
@@ -19249,24 +19210,21 @@
               <p:cTn id="2" dur="indefinite" nodeType="mainSeq">
                 <p:childTnLst>
                   <p:par>
-                    <p:cTn id="3" fill="hold" nodeType="clickPar">
+                    <p:cTn id="3" fill="hold">
                       <p:stCondLst>
-                        <p:cond delay="indefinite"/>
-                        <p:cond evt="onBegin" delay="0">
-                          <p:tn val="2"/>
-                        </p:cond>
+                        <p:cond delay="0"/>
                       </p:stCondLst>
                       <p:childTnLst>
                         <p:par>
-                          <p:cTn id="4" fill="hold" nodeType="afterGroup">
+                          <p:cTn id="4" fill="hold">
                             <p:stCondLst>
-                              <p:cond delay="0"/>
+                              <p:cond delay="30000"/>
                             </p:stCondLst>
                             <p:childTnLst>
                               <p:par>
-                                <p:cTn id="5" presetID="1" presetClass="entr" presetSubtype="0" fill="hold" grpId="0" nodeType="afterEffect">
+                                <p:cTn id="5" presetID="1" presetClass="entr" presetSubtype="0" fill="hold" grpId="0" nodeType="withEffect">
                                   <p:stCondLst>
-                                    <p:cond delay="40000"/>
+                                    <p:cond delay="0"/>
                                   </p:stCondLst>
                                   <p:childTnLst>
                                     <p:set>
@@ -19863,24 +19821,21 @@
               <p:cTn id="2" dur="indefinite" nodeType="mainSeq">
                 <p:childTnLst>
                   <p:par>
-                    <p:cTn id="3" fill="hold" nodeType="clickPar">
+                    <p:cTn id="3" fill="hold">
                       <p:stCondLst>
-                        <p:cond delay="indefinite"/>
-                        <p:cond evt="onBegin" delay="0">
-                          <p:tn val="2"/>
-                        </p:cond>
+                        <p:cond delay="0"/>
                       </p:stCondLst>
                       <p:childTnLst>
                         <p:par>
-                          <p:cTn id="4" fill="hold" nodeType="afterGroup">
+                          <p:cTn id="4" fill="hold">
                             <p:stCondLst>
-                              <p:cond delay="0"/>
+                              <p:cond delay="30000"/>
                             </p:stCondLst>
                             <p:childTnLst>
                               <p:par>
-                                <p:cTn id="5" presetID="1" presetClass="entr" presetSubtype="0" fill="hold" grpId="0" nodeType="afterEffect">
+                                <p:cTn id="5" presetID="1" presetClass="entr" presetSubtype="0" fill="hold" grpId="0" nodeType="withEffect">
                                   <p:stCondLst>
-                                    <p:cond delay="40000"/>
+                                    <p:cond delay="0"/>
                                   </p:stCondLst>
                                   <p:childTnLst>
                                     <p:set>
@@ -20573,24 +20528,21 @@
               <p:cTn id="2" dur="indefinite" nodeType="mainSeq">
                 <p:childTnLst>
                   <p:par>
-                    <p:cTn id="3" fill="hold" nodeType="clickPar">
+                    <p:cTn id="3" fill="hold">
                       <p:stCondLst>
-                        <p:cond delay="indefinite"/>
-                        <p:cond evt="onBegin" delay="0">
-                          <p:tn val="2"/>
-                        </p:cond>
+                        <p:cond delay="0"/>
                       </p:stCondLst>
                       <p:childTnLst>
                         <p:par>
-                          <p:cTn id="4" fill="hold" nodeType="afterGroup">
+                          <p:cTn id="4" fill="hold">
                             <p:stCondLst>
-                              <p:cond delay="0"/>
+                              <p:cond delay="30000"/>
                             </p:stCondLst>
                             <p:childTnLst>
                               <p:par>
-                                <p:cTn id="5" presetID="1" presetClass="entr" presetSubtype="0" fill="hold" grpId="0" nodeType="afterEffect">
+                                <p:cTn id="5" presetID="1" presetClass="entr" presetSubtype="0" fill="hold" grpId="0" nodeType="withEffect">
                                   <p:stCondLst>
-                                    <p:cond delay="40000"/>
+                                    <p:cond delay="0"/>
                                   </p:stCondLst>
                                   <p:childTnLst>
                                     <p:set>
@@ -21283,24 +21235,21 @@
               <p:cTn id="2" dur="indefinite" nodeType="mainSeq">
                 <p:childTnLst>
                   <p:par>
-                    <p:cTn id="3" fill="hold" nodeType="clickPar">
+                    <p:cTn id="3" fill="hold">
                       <p:stCondLst>
-                        <p:cond delay="indefinite"/>
-                        <p:cond evt="onBegin" delay="0">
-                          <p:tn val="2"/>
-                        </p:cond>
+                        <p:cond delay="0"/>
                       </p:stCondLst>
                       <p:childTnLst>
                         <p:par>
-                          <p:cTn id="4" fill="hold" nodeType="afterGroup">
+                          <p:cTn id="4" fill="hold">
                             <p:stCondLst>
-                              <p:cond delay="0"/>
+                              <p:cond delay="30000"/>
                             </p:stCondLst>
                             <p:childTnLst>
                               <p:par>
-                                <p:cTn id="5" presetID="1" presetClass="entr" presetSubtype="0" fill="hold" grpId="0" nodeType="afterEffect">
+                                <p:cTn id="5" presetID="1" presetClass="entr" presetSubtype="0" fill="hold" grpId="0" nodeType="withEffect">
                                   <p:stCondLst>
-                                    <p:cond delay="40000"/>
+                                    <p:cond delay="0"/>
                                   </p:stCondLst>
                                   <p:childTnLst>
                                     <p:set>
@@ -21993,24 +21942,21 @@
               <p:cTn id="2" dur="indefinite" nodeType="mainSeq">
                 <p:childTnLst>
                   <p:par>
-                    <p:cTn id="3" fill="hold" nodeType="clickPar">
+                    <p:cTn id="3" fill="hold">
                       <p:stCondLst>
-                        <p:cond delay="indefinite"/>
-                        <p:cond evt="onBegin" delay="0">
-                          <p:tn val="2"/>
-                        </p:cond>
+                        <p:cond delay="0"/>
                       </p:stCondLst>
                       <p:childTnLst>
                         <p:par>
-                          <p:cTn id="4" fill="hold" nodeType="afterGroup">
+                          <p:cTn id="4" fill="hold">
                             <p:stCondLst>
-                              <p:cond delay="0"/>
+                              <p:cond delay="30000"/>
                             </p:stCondLst>
                             <p:childTnLst>
                               <p:par>
-                                <p:cTn id="5" presetID="1" presetClass="entr" presetSubtype="0" fill="hold" grpId="0" nodeType="afterEffect">
+                                <p:cTn id="5" presetID="1" presetClass="entr" presetSubtype="0" fill="hold" grpId="0" nodeType="withEffect">
                                   <p:stCondLst>
-                                    <p:cond delay="40000"/>
+                                    <p:cond delay="0"/>
                                   </p:stCondLst>
                                   <p:childTnLst>
                                     <p:set>
@@ -22851,24 +22797,21 @@
               <p:cTn id="2" dur="indefinite" nodeType="mainSeq">
                 <p:childTnLst>
                   <p:par>
-                    <p:cTn id="3" fill="hold" nodeType="clickPar">
+                    <p:cTn id="3" fill="hold">
                       <p:stCondLst>
-                        <p:cond delay="indefinite"/>
-                        <p:cond evt="onBegin" delay="0">
-                          <p:tn val="2"/>
-                        </p:cond>
+                        <p:cond delay="0"/>
                       </p:stCondLst>
                       <p:childTnLst>
                         <p:par>
-                          <p:cTn id="4" fill="hold" nodeType="afterGroup">
+                          <p:cTn id="4" fill="hold">
                             <p:stCondLst>
-                              <p:cond delay="0"/>
+                              <p:cond delay="30000"/>
                             </p:stCondLst>
                             <p:childTnLst>
                               <p:par>
-                                <p:cTn id="5" presetID="1" presetClass="entr" presetSubtype="0" fill="hold" grpId="0" nodeType="afterEffect">
+                                <p:cTn id="5" presetID="1" presetClass="entr" presetSubtype="0" fill="hold" grpId="0" nodeType="withEffect">
                                   <p:stCondLst>
-                                    <p:cond delay="40000"/>
+                                    <p:cond delay="0"/>
                                   </p:stCondLst>
                                   <p:childTnLst>
                                     <p:set>
@@ -23930,24 +23873,21 @@
               <p:cTn id="2" dur="indefinite" nodeType="mainSeq">
                 <p:childTnLst>
                   <p:par>
-                    <p:cTn id="3" fill="hold" nodeType="clickPar">
+                    <p:cTn id="3" fill="hold">
                       <p:stCondLst>
-                        <p:cond delay="indefinite"/>
-                        <p:cond evt="onBegin" delay="0">
-                          <p:tn val="2"/>
-                        </p:cond>
+                        <p:cond delay="0"/>
                       </p:stCondLst>
                       <p:childTnLst>
                         <p:par>
-                          <p:cTn id="4" fill="hold" nodeType="afterGroup">
+                          <p:cTn id="4" fill="hold">
                             <p:stCondLst>
-                              <p:cond delay="0"/>
+                              <p:cond delay="30000"/>
                             </p:stCondLst>
                             <p:childTnLst>
                               <p:par>
-                                <p:cTn id="5" presetID="1" presetClass="entr" presetSubtype="0" fill="hold" grpId="0" nodeType="afterEffect">
+                                <p:cTn id="5" presetID="1" presetClass="entr" presetSubtype="0" fill="hold" grpId="0" nodeType="withEffect">
                                   <p:stCondLst>
-                                    <p:cond delay="40000"/>
+                                    <p:cond delay="0"/>
                                   </p:stCondLst>
                                   <p:childTnLst>
                                     <p:set>
@@ -24696,24 +24636,21 @@
               <p:cTn id="2" dur="indefinite" nodeType="mainSeq">
                 <p:childTnLst>
                   <p:par>
-                    <p:cTn id="3" fill="hold" nodeType="clickPar">
+                    <p:cTn id="3" fill="hold">
                       <p:stCondLst>
-                        <p:cond delay="indefinite"/>
-                        <p:cond evt="onBegin" delay="0">
-                          <p:tn val="2"/>
-                        </p:cond>
+                        <p:cond delay="0"/>
                       </p:stCondLst>
                       <p:childTnLst>
                         <p:par>
-                          <p:cTn id="4" fill="hold" nodeType="afterGroup">
+                          <p:cTn id="4" fill="hold">
                             <p:stCondLst>
-                              <p:cond delay="0"/>
+                              <p:cond delay="30000"/>
                             </p:stCondLst>
                             <p:childTnLst>
                               <p:par>
-                                <p:cTn id="5" presetID="1" presetClass="entr" presetSubtype="0" fill="hold" grpId="0" nodeType="afterEffect">
+                                <p:cTn id="5" presetID="1" presetClass="entr" presetSubtype="0" fill="hold" grpId="0" nodeType="withEffect">
                                   <p:stCondLst>
-                                    <p:cond delay="40000"/>
+                                    <p:cond delay="0"/>
                                   </p:stCondLst>
                                   <p:childTnLst>
                                     <p:set>
@@ -25745,24 +25682,21 @@
               <p:cTn id="2" dur="indefinite" nodeType="mainSeq">
                 <p:childTnLst>
                   <p:par>
-                    <p:cTn id="3" fill="hold" nodeType="clickPar">
+                    <p:cTn id="3" fill="hold">
                       <p:stCondLst>
-                        <p:cond delay="indefinite"/>
-                        <p:cond evt="onBegin" delay="0">
-                          <p:tn val="2"/>
-                        </p:cond>
+                        <p:cond delay="0"/>
                       </p:stCondLst>
                       <p:childTnLst>
                         <p:par>
-                          <p:cTn id="4" fill="hold" nodeType="afterGroup">
+                          <p:cTn id="4" fill="hold">
                             <p:stCondLst>
-                              <p:cond delay="0"/>
+                              <p:cond delay="30000"/>
                             </p:stCondLst>
                             <p:childTnLst>
                               <p:par>
-                                <p:cTn id="5" presetID="1" presetClass="entr" presetSubtype="0" fill="hold" grpId="0" nodeType="afterEffect">
+                                <p:cTn id="5" presetID="1" presetClass="entr" presetSubtype="0" fill="hold" grpId="0" nodeType="withEffect">
                                   <p:stCondLst>
-                                    <p:cond delay="40000"/>
+                                    <p:cond delay="0"/>
                                   </p:stCondLst>
                                   <p:childTnLst>
                                     <p:set>
@@ -26460,24 +26394,21 @@
               <p:cTn id="2" dur="indefinite" nodeType="mainSeq">
                 <p:childTnLst>
                   <p:par>
-                    <p:cTn id="3" fill="hold" nodeType="clickPar">
+                    <p:cTn id="3" fill="hold">
                       <p:stCondLst>
-                        <p:cond delay="indefinite"/>
-                        <p:cond evt="onBegin" delay="0">
-                          <p:tn val="2"/>
-                        </p:cond>
+                        <p:cond delay="0"/>
                       </p:stCondLst>
                       <p:childTnLst>
                         <p:par>
-                          <p:cTn id="4" fill="hold" nodeType="afterGroup">
+                          <p:cTn id="4" fill="hold">
                             <p:stCondLst>
-                              <p:cond delay="0"/>
+                              <p:cond delay="30000"/>
                             </p:stCondLst>
                             <p:childTnLst>
                               <p:par>
-                                <p:cTn id="5" presetID="1" presetClass="entr" presetSubtype="0" fill="hold" grpId="0" nodeType="afterEffect">
+                                <p:cTn id="5" presetID="1" presetClass="entr" presetSubtype="0" fill="hold" grpId="0" nodeType="withEffect">
                                   <p:stCondLst>
-                                    <p:cond delay="40000"/>
+                                    <p:cond delay="0"/>
                                   </p:stCondLst>
                                   <p:childTnLst>
                                     <p:set>
@@ -27226,24 +27157,21 @@
               <p:cTn id="2" dur="indefinite" nodeType="mainSeq">
                 <p:childTnLst>
                   <p:par>
-                    <p:cTn id="3" fill="hold" nodeType="clickPar">
+                    <p:cTn id="3" fill="hold">
                       <p:stCondLst>
-                        <p:cond delay="indefinite"/>
-                        <p:cond evt="onBegin" delay="0">
-                          <p:tn val="2"/>
-                        </p:cond>
+                        <p:cond delay="0"/>
                       </p:stCondLst>
                       <p:childTnLst>
                         <p:par>
-                          <p:cTn id="4" fill="hold" nodeType="afterGroup">
+                          <p:cTn id="4" fill="hold">
                             <p:stCondLst>
-                              <p:cond delay="0"/>
+                              <p:cond delay="30000"/>
                             </p:stCondLst>
                             <p:childTnLst>
                               <p:par>
-                                <p:cTn id="5" presetID="1" presetClass="entr" presetSubtype="0" fill="hold" grpId="0" nodeType="afterEffect">
+                                <p:cTn id="5" presetID="1" presetClass="entr" presetSubtype="0" fill="hold" grpId="0" nodeType="withEffect">
                                   <p:stCondLst>
-                                    <p:cond delay="40000"/>
+                                    <p:cond delay="0"/>
                                   </p:stCondLst>
                                   <p:childTnLst>
                                     <p:set>
@@ -28124,24 +28052,21 @@
               <p:cTn id="2" dur="indefinite" nodeType="mainSeq">
                 <p:childTnLst>
                   <p:par>
-                    <p:cTn id="3" fill="hold" nodeType="clickPar">
+                    <p:cTn id="3" fill="hold">
                       <p:stCondLst>
-                        <p:cond delay="indefinite"/>
-                        <p:cond evt="onBegin" delay="0">
-                          <p:tn val="2"/>
-                        </p:cond>
+                        <p:cond delay="0"/>
                       </p:stCondLst>
                       <p:childTnLst>
                         <p:par>
-                          <p:cTn id="4" fill="hold" nodeType="afterGroup">
+                          <p:cTn id="4" fill="hold">
                             <p:stCondLst>
-                              <p:cond delay="0"/>
+                              <p:cond delay="30000"/>
                             </p:stCondLst>
                             <p:childTnLst>
                               <p:par>
-                                <p:cTn id="5" presetID="1" presetClass="entr" presetSubtype="0" fill="hold" grpId="0" nodeType="afterEffect">
+                                <p:cTn id="5" presetID="1" presetClass="entr" presetSubtype="0" fill="hold" grpId="0" nodeType="withEffect">
                                   <p:stCondLst>
-                                    <p:cond delay="40000"/>
+                                    <p:cond delay="0"/>
                                   </p:stCondLst>
                                   <p:childTnLst>
                                     <p:set>
